--- a/DataScienceProject/Credit_Scoring_EDA_Presentation.pptx
+++ b/DataScienceProject/Credit_Scoring_EDA_Presentation.pptx
@@ -333,7 +333,7 @@
           <a:p>
             <a:fld id="{5BCAD085-E8A6-8845-BD4E-CB4CCA059FC4}" type="datetimeFigureOut">
               <a:rPr lang="en-US" smtClean="0"/>
-              <a:t>4/24/2026</a:t>
+              <a:t>5/1/2026</a:t>
             </a:fld>
             <a:endParaRPr lang="en-US"/>
           </a:p>
@@ -506,7 +506,7 @@
           <a:p>
             <a:fld id="{5BCAD085-E8A6-8845-BD4E-CB4CCA059FC4}" type="datetimeFigureOut">
               <a:rPr lang="en-US" smtClean="0"/>
-              <a:t>4/24/2026</a:t>
+              <a:t>5/1/2026</a:t>
             </a:fld>
             <a:endParaRPr lang="en-US"/>
           </a:p>
@@ -689,7 +689,7 @@
           <a:p>
             <a:fld id="{5BCAD085-E8A6-8845-BD4E-CB4CCA059FC4}" type="datetimeFigureOut">
               <a:rPr lang="en-US" smtClean="0"/>
-              <a:t>4/24/2026</a:t>
+              <a:t>5/1/2026</a:t>
             </a:fld>
             <a:endParaRPr lang="en-US"/>
           </a:p>
@@ -862,7 +862,7 @@
           <a:p>
             <a:fld id="{5BCAD085-E8A6-8845-BD4E-CB4CCA059FC4}" type="datetimeFigureOut">
               <a:rPr lang="en-US" smtClean="0"/>
-              <a:t>4/24/2026</a:t>
+              <a:t>5/1/2026</a:t>
             </a:fld>
             <a:endParaRPr lang="en-US"/>
           </a:p>
@@ -1111,7 +1111,7 @@
           <a:p>
             <a:fld id="{5BCAD085-E8A6-8845-BD4E-CB4CCA059FC4}" type="datetimeFigureOut">
               <a:rPr lang="en-US" smtClean="0"/>
-              <a:t>4/24/2026</a:t>
+              <a:t>5/1/2026</a:t>
             </a:fld>
             <a:endParaRPr lang="en-US"/>
           </a:p>
@@ -1402,7 +1402,7 @@
           <a:p>
             <a:fld id="{5BCAD085-E8A6-8845-BD4E-CB4CCA059FC4}" type="datetimeFigureOut">
               <a:rPr lang="en-US" smtClean="0"/>
-              <a:t>4/24/2026</a:t>
+              <a:t>5/1/2026</a:t>
             </a:fld>
             <a:endParaRPr lang="en-US"/>
           </a:p>
@@ -1827,7 +1827,7 @@
           <a:p>
             <a:fld id="{5BCAD085-E8A6-8845-BD4E-CB4CCA059FC4}" type="datetimeFigureOut">
               <a:rPr lang="en-US" smtClean="0"/>
-              <a:t>4/24/2026</a:t>
+              <a:t>5/1/2026</a:t>
             </a:fld>
             <a:endParaRPr lang="en-US"/>
           </a:p>
@@ -1948,7 +1948,7 @@
           <a:p>
             <a:fld id="{5BCAD085-E8A6-8845-BD4E-CB4CCA059FC4}" type="datetimeFigureOut">
               <a:rPr lang="en-US" smtClean="0"/>
-              <a:t>4/24/2026</a:t>
+              <a:t>5/1/2026</a:t>
             </a:fld>
             <a:endParaRPr lang="en-US"/>
           </a:p>
@@ -2046,7 +2046,7 @@
           <a:p>
             <a:fld id="{5BCAD085-E8A6-8845-BD4E-CB4CCA059FC4}" type="datetimeFigureOut">
               <a:rPr lang="en-US" smtClean="0"/>
-              <a:t>4/24/2026</a:t>
+              <a:t>5/1/2026</a:t>
             </a:fld>
             <a:endParaRPr lang="en-US"/>
           </a:p>
@@ -2326,7 +2326,7 @@
           <a:p>
             <a:fld id="{5BCAD085-E8A6-8845-BD4E-CB4CCA059FC4}" type="datetimeFigureOut">
               <a:rPr lang="en-US" smtClean="0"/>
-              <a:t>4/24/2026</a:t>
+              <a:t>5/1/2026</a:t>
             </a:fld>
             <a:endParaRPr lang="en-US"/>
           </a:p>
@@ -2582,7 +2582,7 @@
           <a:p>
             <a:fld id="{5BCAD085-E8A6-8845-BD4E-CB4CCA059FC4}" type="datetimeFigureOut">
               <a:rPr lang="en-US" smtClean="0"/>
-              <a:t>4/24/2026</a:t>
+              <a:t>5/1/2026</a:t>
             </a:fld>
             <a:endParaRPr lang="en-US"/>
           </a:p>
@@ -2798,7 +2798,7 @@
           <a:p>
             <a:fld id="{5BCAD085-E8A6-8845-BD4E-CB4CCA059FC4}" type="datetimeFigureOut">
               <a:rPr lang="en-US" smtClean="0"/>
-              <a:t>4/24/2026</a:t>
+              <a:t>5/1/2026</a:t>
             </a:fld>
             <a:endParaRPr lang="en-US"/>
           </a:p>
@@ -3453,6 +3453,55 @@
           </a:prstGeom>
         </p:spPr>
       </p:pic>
+      <p:sp>
+        <p:nvSpPr>
+          <p:cNvPr id="9" name="Oval 8"/>
+          <p:cNvSpPr/>
+          <p:nvPr/>
+        </p:nvSpPr>
+        <p:spPr>
+          <a:xfrm>
+            <a:off x="6410960" y="3931920"/>
+            <a:ext cx="1554480" cy="640080"/>
+          </a:xfrm>
+          <a:prstGeom prst="ellipse">
+            <a:avLst/>
+          </a:prstGeom>
+          <a:solidFill>
+            <a:schemeClr val="bg1"/>
+          </a:solidFill>
+          <a:ln>
+            <a:solidFill>
+              <a:schemeClr val="bg2"/>
+            </a:solidFill>
+          </a:ln>
+        </p:spPr>
+        <p:style>
+          <a:lnRef idx="2">
+            <a:schemeClr val="dk1"/>
+          </a:lnRef>
+          <a:fillRef idx="1">
+            <a:schemeClr val="lt1"/>
+          </a:fillRef>
+          <a:effectRef idx="0">
+            <a:schemeClr val="dk1"/>
+          </a:effectRef>
+          <a:fontRef idx="minor">
+            <a:schemeClr val="dk1"/>
+          </a:fontRef>
+        </p:style>
+        <p:txBody>
+          <a:bodyPr rtlCol="0" anchor="ctr"/>
+          <a:lstStyle/>
+          <a:p>
+            <a:pPr algn="ctr"/>
+            <a:r>
+              <a:rPr lang="en-US" dirty="0" smtClean="0"/>
+              <a:t>D.E</a:t>
+            </a:r>
+          </a:p>
+        </p:txBody>
+      </p:sp>
     </p:spTree>
   </p:cSld>
   <p:clrMapOvr>
@@ -10637,8 +10686,8 @@
         </p:nvSpPr>
         <p:spPr>
           <a:xfrm>
-            <a:off x="1371600" y="1508760"/>
-            <a:ext cx="6858000" cy="548640"/>
+            <a:off x="1371600" y="1629191"/>
+            <a:ext cx="6858000" cy="307777"/>
           </a:xfrm>
           <a:prstGeom prst="rect">
             <a:avLst/>
@@ -10659,7 +10708,24 @@
               </a:defRPr>
             </a:pPr>
             <a:r>
-              <a:t>Dataset contains 150,000 borrower records with 12 features</a:t>
+              <a:rPr dirty="0"/>
+              <a:t>Dataset contains 150,000 borrower records with </a:t>
+            </a:r>
+            <a:r>
+              <a:rPr dirty="0" smtClean="0"/>
+              <a:t>1</a:t>
+            </a:r>
+            <a:r>
+              <a:rPr lang="en-US" dirty="0" smtClean="0"/>
+              <a:t>1</a:t>
+            </a:r>
+            <a:r>
+              <a:rPr dirty="0" smtClean="0"/>
+              <a:t> </a:t>
+            </a:r>
+            <a:r>
+              <a:rPr dirty="0"/>
+              <a:t>features</a:t>
             </a:r>
           </a:p>
         </p:txBody>
@@ -10797,8 +10863,8 @@
         </p:nvSpPr>
         <p:spPr>
           <a:xfrm>
-            <a:off x="1371600" y="2468879"/>
-            <a:ext cx="6858000" cy="548640"/>
+            <a:off x="1371600" y="2481589"/>
+            <a:ext cx="6858000" cy="523220"/>
           </a:xfrm>
           <a:prstGeom prst="rect">
             <a:avLst/>
@@ -10819,7 +10885,28 @@
               </a:defRPr>
             </a:pPr>
             <a:r>
-              <a:t>Missing values successfully imputed using mean method (19.82% in MonthlyIncome)</a:t>
+              <a:rPr dirty="0"/>
+              <a:t>Missing values successfully imputed using </a:t>
+            </a:r>
+            <a:r>
+              <a:rPr lang="en-US" dirty="0" smtClean="0"/>
+              <a:t>median and mode</a:t>
+            </a:r>
+            <a:r>
+              <a:rPr dirty="0" smtClean="0"/>
+              <a:t> </a:t>
+            </a:r>
+            <a:r>
+              <a:rPr dirty="0"/>
+              <a:t>method (19.82% in </a:t>
+            </a:r>
+            <a:r>
+              <a:rPr dirty="0" err="1"/>
+              <a:t>MonthlyIncome</a:t>
+            </a:r>
+            <a:r>
+              <a:rPr dirty="0"/>
+              <a:t>)</a:t>
             </a:r>
           </a:p>
         </p:txBody>
@@ -11347,7 +11434,7 @@
         </p:nvSpPr>
         <p:spPr>
           <a:xfrm>
-            <a:off x="0" y="0"/>
+            <a:off x="0" y="10160"/>
             <a:ext cx="9144000" cy="6858000"/>
           </a:xfrm>
           <a:prstGeom prst="rect">
@@ -11515,7 +11602,7 @@
         <p:spPr>
           <a:xfrm>
             <a:off x="731520" y="1371600"/>
-            <a:ext cx="7680960" cy="4114800"/>
+            <a:ext cx="7680960" cy="2523768"/>
           </a:xfrm>
           <a:prstGeom prst="rect">
             <a:avLst/>
@@ -11539,6 +11626,7 @@
               </a:defRPr>
             </a:pPr>
             <a:r>
+              <a:rPr dirty="0"/>
               <a:t>Total Records: 150,000 borrowers</a:t>
             </a:r>
           </a:p>
@@ -11554,7 +11642,40 @@
               </a:defRPr>
             </a:pPr>
             <a:r>
-              <a:t>Total Features: 12 (11 numerical, 1 target)</a:t>
+              <a:rPr dirty="0"/>
+              <a:t>Total Features: </a:t>
+            </a:r>
+            <a:r>
+              <a:rPr dirty="0" smtClean="0"/>
+              <a:t>1</a:t>
+            </a:r>
+            <a:r>
+              <a:rPr lang="en-US" dirty="0" smtClean="0"/>
+              <a:t>1</a:t>
+            </a:r>
+            <a:r>
+              <a:rPr dirty="0" smtClean="0"/>
+              <a:t> </a:t>
+            </a:r>
+            <a:r>
+              <a:rPr dirty="0"/>
+              <a:t>(</a:t>
+            </a:r>
+            <a:r>
+              <a:rPr dirty="0" smtClean="0"/>
+              <a:t>1</a:t>
+            </a:r>
+            <a:r>
+              <a:rPr lang="en-US" dirty="0" smtClean="0"/>
+              <a:t>0</a:t>
+            </a:r>
+            <a:r>
+              <a:rPr dirty="0" smtClean="0"/>
+              <a:t> </a:t>
+            </a:r>
+            <a:r>
+              <a:rPr dirty="0"/>
+              <a:t>numerical, 1 target)</a:t>
             </a:r>
           </a:p>
           <a:p>
@@ -11569,6 +11690,7 @@
               </a:defRPr>
             </a:pPr>
             <a:r>
+              <a:rPr dirty="0"/>
               <a:t>Target Variable: SeriousDlqin2yrs (Binary: Default/No Default)</a:t>
             </a:r>
           </a:p>
@@ -11584,6 +11706,7 @@
               </a:defRPr>
             </a:pPr>
             <a:r>
+              <a:rPr dirty="0"/>
               <a:t>Time Period: 2-year observation window</a:t>
             </a:r>
           </a:p>
@@ -11599,6 +11722,7 @@
               </a:defRPr>
             </a:pPr>
             <a:r>
+              <a:rPr dirty="0"/>
               <a:t>Data Quality: Missing values in 2 features (handled via imputation)</a:t>
             </a:r>
           </a:p>
@@ -11614,6 +11738,7 @@
               </a:defRPr>
             </a:pPr>
             <a:r>
+              <a:rPr dirty="0"/>
               <a:t>Feature Categories: Demographics, Financial Metrics, Credit History</a:t>
             </a:r>
           </a:p>
@@ -12205,7 +12330,7 @@
         <p:spPr>
           <a:xfrm>
             <a:off x="731520" y="1371600"/>
-            <a:ext cx="7680960" cy="4114800"/>
+            <a:ext cx="7680960" cy="4247317"/>
           </a:xfrm>
           <a:prstGeom prst="rect">
             <a:avLst/>
@@ -12229,7 +12354,12 @@
               </a:defRPr>
             </a:pPr>
             <a:r>
-              <a:t>MonthlyIncome: 29,731 missing (19.82%)</a:t>
+              <a:rPr dirty="0" err="1"/>
+              <a:t>MonthlyIncome</a:t>
+            </a:r>
+            <a:r>
+              <a:rPr dirty="0"/>
+              <a:t>: 29,731 missing (19.82%)</a:t>
             </a:r>
           </a:p>
           <a:p>
@@ -12244,6 +12374,7 @@
               </a:defRPr>
             </a:pPr>
             <a:r>
+              <a:rPr dirty="0"/>
               <a:t>  → Critical financial indicator requiring imputation</a:t>
             </a:r>
           </a:p>
@@ -12259,7 +12390,20 @@
               </a:defRPr>
             </a:pPr>
             <a:r>
-              <a:t>  → Mean imputation applied to preserve distribution</a:t>
+              <a:rPr dirty="0"/>
+              <a:t>  → </a:t>
+            </a:r>
+            <a:r>
+              <a:rPr lang="en-US" dirty="0" smtClean="0"/>
+              <a:t>Median</a:t>
+            </a:r>
+            <a:r>
+              <a:rPr dirty="0" smtClean="0"/>
+              <a:t> </a:t>
+            </a:r>
+            <a:r>
+              <a:rPr dirty="0"/>
+              <a:t>imputation applied to preserve distribution</a:t>
             </a:r>
           </a:p>
           <a:p>
@@ -12273,7 +12417,7 @@
                 </a:solidFill>
               </a:defRPr>
             </a:pPr>
-            <a:endParaRPr/>
+            <a:endParaRPr dirty="0"/>
           </a:p>
           <a:p>
             <a:pPr>
@@ -12287,7 +12431,12 @@
               </a:defRPr>
             </a:pPr>
             <a:r>
-              <a:t>NumberOfDependents: 3,924 missing (2.62%)</a:t>
+              <a:rPr dirty="0" err="1"/>
+              <a:t>NumberOfDependents</a:t>
+            </a:r>
+            <a:r>
+              <a:rPr dirty="0"/>
+              <a:t>: 3,924 missing (2.62%)</a:t>
             </a:r>
           </a:p>
           <a:p>
@@ -12302,6 +12451,7 @@
               </a:defRPr>
             </a:pPr>
             <a:r>
+              <a:rPr dirty="0"/>
               <a:t>  → Lower impact on overall data quality</a:t>
             </a:r>
           </a:p>
@@ -12317,7 +12467,20 @@
               </a:defRPr>
             </a:pPr>
             <a:r>
-              <a:t>  → Mean imputation maintains demographic patterns</a:t>
+              <a:rPr dirty="0"/>
+              <a:t>  → </a:t>
+            </a:r>
+            <a:r>
+              <a:rPr lang="en-US" dirty="0" smtClean="0"/>
+              <a:t>Mode</a:t>
+            </a:r>
+            <a:r>
+              <a:rPr dirty="0" smtClean="0"/>
+              <a:t> </a:t>
+            </a:r>
+            <a:r>
+              <a:rPr dirty="0"/>
+              <a:t>imputation maintains demographic patterns</a:t>
             </a:r>
           </a:p>
           <a:p>
@@ -12331,7 +12494,7 @@
                 </a:solidFill>
               </a:defRPr>
             </a:pPr>
-            <a:endParaRPr/>
+            <a:endParaRPr dirty="0"/>
           </a:p>
           <a:p>
             <a:pPr>
@@ -12345,6 +12508,7 @@
               </a:defRPr>
             </a:pPr>
             <a:r>
+              <a:rPr dirty="0"/>
               <a:t>✅ All missing values successfully handled</a:t>
             </a:r>
           </a:p>
@@ -12360,6 +12524,7 @@
               </a:defRPr>
             </a:pPr>
             <a:r>
+              <a:rPr dirty="0"/>
               <a:t>✅ Zero missing values in cleaned dataset</a:t>
             </a:r>
           </a:p>
